--- a/CapStone Project/docs/presentation/source/build/ClaimGuard_Capstone_Praesentation_DE.pptx
+++ b/CapStone Project/docs/presentation/source/build/ClaimGuard_Capstone_Praesentation_DE.pptx
@@ -759,7 +759,7 @@
           </a:p>
           <a:p>
             <a:r>
-              <a:t>Je zwei konkrete Stärken und Schwächen nennen. Fast-DetectGPT erzeugte in diesem kleinen Set keinen menschlichen Fehlalarm, übersah aber 7 von 15 generierten Texten. Der offizielle Datensatz enthält keine Zitiermarker; eine Korrelation wird daher nicht behauptet. Private Berichte wurden nicht an den externen Detektor gesendet.</a:t>
+              <a:t>Je zwei konkrete Stärken und Schwächen nennen. In manuellen Läufen am 7. Juli 2026 lieferten Semantic-Scholar-Anfragen ohne API-Key und OpenAlex-Anfragen mit konfiguriertem mailto-Parameter wiederholt HTTP 429, auch nach mehreren Minuten Wartezeit und mit einer neuen Eingabedatei. Das ist eine beobachtete Dienstbedingung und kein systematischer API-Verfügbarkeitsbenchmark; fehlende Abstract- oder Volltextevidenz kann dadurch zu unzureichender Evidenz führen. Fast-DetectGPT erzeugte in diesem kleinen Set keinen menschlichen Fehlalarm, übersah aber 7 von 15 generierten Texten. Der offizielle Datensatz enthält keine Zitiermarker; eine Korrelation wird daher nicht behauptet. Private Berichte wurden nicht an den externen Detektor gesendet.</a:t>
             </a:r>
           </a:p>
         </p:txBody>
@@ -5587,7 +5587,7 @@
               </a:defRPr>
             </a:pPr>
             <a:r>
-              <a:t>•  Metadaten-APIs können ausfallen oder drosseln</a:t>
+              <a:t>•  Wiederholte S2/OpenAlex-HTTP-429-Fehler in manuellen Läufen</a:t>
             </a:r>
           </a:p>
           <a:p>
